--- a/docs/LLM_Planning_Presentation.pptx
+++ b/docs/LLM_Planning_Presentation.pptx
@@ -5,7 +5,7 @@
     <p:sldMasterId id="2147483648" r:id="rId1"/>
   </p:sldMasterIdLst>
   <p:notesMasterIdLst>
-    <p:notesMasterId r:id="rId14"/>
+    <p:notesMasterId r:id="rId15"/>
   </p:notesMasterIdLst>
   <p:sldIdLst>
     <p:sldId id="256" r:id="rId2"/>
@@ -20,6 +20,7 @@
     <p:sldId id="265" r:id="rId11"/>
     <p:sldId id="266" r:id="rId12"/>
     <p:sldId id="267" r:id="rId13"/>
+    <p:sldId id="268" r:id="rId14"/>
   </p:sldIdLst>
   <p:sldSz cx="12192000" cy="6858000"/>
   <p:notesSz cx="6858000" cy="12192000"/>
@@ -3607,28 +3608,6 @@
               </a:rPr>
               <a:t>Sample sizes are small — 10 to 20 instances per cell.</a:t>
             </a:r>
-            <a:endParaRPr lang="en-US" sz="1650" dirty="0"/>
-          </a:p>
-          <a:p>
-            <a:pPr marL="203200" indent="-203200">
-              <a:lnSpc>
-                <a:spcPts val="2300"/>
-              </a:lnSpc>
-              <a:buSzPct val="100000"/>
-              <a:buChar char="•"/>
-            </a:pPr>
-            <a:r>
-              <a:rPr lang="en-US" sz="1650" dirty="0">
-                <a:solidFill>
-                  <a:srgbClr val="3A3A3A"/>
-                </a:solidFill>
-                <a:latin typeface="Calibri" pitchFamily="34" charset="0"/>
-                <a:ea typeface="Calibri" pitchFamily="34" charset="-122"/>
-                <a:cs typeface="Calibri" pitchFamily="34" charset="-120"/>
-              </a:rPr>
-              <a:t>The prompt does not handle numeric fluents, which partly explains the low citycar and tetris scores.</a:t>
-            </a:r>
-            <a:endParaRPr lang="en-US" sz="1650" dirty="0"/>
           </a:p>
         </p:txBody>
       </p:sp>
@@ -3806,7 +3785,7 @@
                 <a:ea typeface="Calibri" pitchFamily="34" charset="-122"/>
                 <a:cs typeface="Calibri" pitchFamily="34" charset="-120"/>
               </a:rPr>
-              <a:t>Reasoning post-training is a net negative for PDDL planning — the largest single effect in the study.</a:t>
+              <a:t>Reasoning post-training is a net negative for PDDL planning, the largest single effect in the study.</a:t>
             </a:r>
             <a:endParaRPr lang="en-US" sz="1700" dirty="0"/>
           </a:p>
@@ -3904,7 +3883,7 @@
                 <a:ea typeface="Calibri" pitchFamily="34" charset="-122"/>
                 <a:cs typeface="Calibri" pitchFamily="34" charset="-120"/>
               </a:rPr>
-              <a:t>The full pipeline is reproducible — one notebook regenerates every figure and table from the raw CSVs.</a:t>
+              <a:t>The full pipeline is reproducible, one notebook regenerates every figure and table from the raw CSVs.</a:t>
             </a:r>
             <a:endParaRPr lang="en-US" sz="1700" dirty="0"/>
           </a:p>
@@ -3997,6 +3976,80 @@
         </p:txBody>
       </p:sp>
     </p:spTree>
+  </p:cSld>
+  <p:clrMapOvr>
+    <a:masterClrMapping/>
+  </p:clrMapOvr>
+</p:sld>
+</file>
+
+<file path=ppt/slides/slide13.xml><?xml version="1.0" encoding="utf-8"?>
+<p:sld xmlns:a="http://schemas.openxmlformats.org/drawingml/2006/main" xmlns:r="http://schemas.openxmlformats.org/officeDocument/2006/relationships" xmlns:p="http://schemas.openxmlformats.org/presentationml/2006/main">
+  <p:cSld>
+    <p:spTree>
+      <p:nvGrpSpPr>
+        <p:cNvPr id="1" name=""/>
+        <p:cNvGrpSpPr/>
+        <p:nvPr/>
+      </p:nvGrpSpPr>
+      <p:grpSpPr>
+        <a:xfrm>
+          <a:off x="0" y="0"/>
+          <a:ext cx="0" cy="0"/>
+          <a:chOff x="0" y="0"/>
+          <a:chExt cx="0" cy="0"/>
+        </a:xfrm>
+      </p:grpSpPr>
+      <p:sp>
+        <p:nvSpPr>
+          <p:cNvPr id="3" name="TextBox 2">
+            <a:extLst>
+              <a:ext uri="{FF2B5EF4-FFF2-40B4-BE49-F238E27FC236}">
+                <a16:creationId xmlns:a16="http://schemas.microsoft.com/office/drawing/2014/main" id="{7D1674AE-FC9A-E7E1-7CB4-39F659460D6A}"/>
+              </a:ext>
+            </a:extLst>
+          </p:cNvPr>
+          <p:cNvSpPr txBox="1"/>
+          <p:nvPr/>
+        </p:nvSpPr>
+        <p:spPr>
+          <a:xfrm>
+            <a:off x="3952567" y="3059668"/>
+            <a:ext cx="4286865" cy="461665"/>
+          </a:xfrm>
+          <a:prstGeom prst="rect">
+            <a:avLst/>
+          </a:prstGeom>
+          <a:noFill/>
+        </p:spPr>
+        <p:txBody>
+          <a:bodyPr wrap="square">
+            <a:spAutoFit/>
+          </a:bodyPr>
+          <a:lstStyle/>
+          <a:p>
+            <a:pPr algn="ctr"/>
+            <a:r>
+              <a:rPr lang="en-US" sz="2400" b="1" dirty="0">
+                <a:solidFill>
+                  <a:srgbClr val="1F2733"/>
+                </a:solidFill>
+                <a:latin typeface="Georgia" pitchFamily="34" charset="0"/>
+                <a:ea typeface="Georgia" pitchFamily="34" charset="-122"/>
+                <a:cs typeface="Georgia" pitchFamily="34" charset="-120"/>
+              </a:rPr>
+              <a:t>Thank You!</a:t>
+            </a:r>
+            <a:endParaRPr lang="en-US" sz="2400" dirty="0"/>
+          </a:p>
+        </p:txBody>
+      </p:sp>
+    </p:spTree>
+    <p:extLst>
+      <p:ext uri="{BB962C8B-B14F-4D97-AF65-F5344CB8AC3E}">
+        <p14:creationId xmlns:p14="http://schemas.microsoft.com/office/powerpoint/2010/main" val="2693094206"/>
+      </p:ext>
+    </p:extLst>
   </p:cSld>
   <p:clrMapOvr>
     <a:masterClrMapping/>
@@ -6498,7 +6551,7 @@
                 <a:ea typeface="Calibri" pitchFamily="34" charset="-122"/>
                 <a:cs typeface="Calibri" pitchFamily="34" charset="-120"/>
               </a:rPr>
-              <a:t>Problems that are harder for a classical planner are also harder for the LLMs (slope −4.0 points per step, r = −0.83).</a:t>
+              <a:t>Problems that are harder for a classical planner are also harder for the LLMs.</a:t>
             </a:r>
             <a:endParaRPr lang="en-US" sz="1600" dirty="0"/>
           </a:p>
